--- a/docs/홍보/하루차림-환자-발표.pptx
+++ b/docs/홍보/하루차림-환자-발표.pptx
@@ -13727,7 +13727,7 @@
                 <a:ea typeface="Apple SD Gothic Neo"/>
                 <a:cs typeface="Apple SD Gothic Neo"/>
               </a:rPr>
-              <a:t>88</a:t>
+              <a:t>86</a:t>
             </a:r>
             <a:r>
               <a:rPr sz="1800" b="1">
@@ -15648,7 +15648,7 @@
                 <a:ea typeface="Apple SD Gothic Neo"/>
                 <a:cs typeface="Apple SD Gothic Neo"/>
               </a:rPr>
-              <a:t>2,299,569</a:t>
+              <a:t>2,358,912</a:t>
             </a:r>
             <a:r>
               <a:rPr sz="2600" b="1">

--- a/docs/홍보/하루차림-환자-발표.pptx
+++ b/docs/홍보/하루차림-환자-발표.pptx
@@ -10887,7 +10887,7 @@
                 <a:ea typeface="Apple SD Gothic Neo"/>
                 <a:cs typeface="Apple SD Gothic Neo"/>
               </a:rPr>
-              <a:t>2,358,912</a:t>
+              <a:t>2,363,971</a:t>
             </a:r>
             <a:r>
               <a:rPr sz="4000" b="1">

--- a/docs/홍보/하루차림-환자-발표.pptx
+++ b/docs/홍보/하루차림-환자-발표.pptx
@@ -13,6 +13,7 @@
     <p:sldId id="261" r:id="rId12"/>
     <p:sldId id="262" r:id="rId13"/>
     <p:sldId id="263" r:id="rId14"/>
+    <p:sldId id="266" r:id="rId17"/>
     <p:sldId id="264" r:id="rId15"/>
     <p:sldId id="265" r:id="rId16"/>
   </p:sldIdLst>
@@ -3114,7 +3115,7 @@
         <p:spPr>
           <a:xfrm>
             <a:off x="0" y="0"/>
-            <a:ext cx="1219169" cy="45720"/>
+            <a:ext cx="1108335" cy="45720"/>
           </a:xfrm>
           <a:prstGeom prst="rect">
             <a:avLst/>
@@ -3183,29 +3184,7 @@
                 <a:ea typeface="Apple SD Gothic Neo"/>
                 <a:cs typeface="Apple SD Gothic Neo"/>
               </a:rPr>
-              <a:t>01</a:t>
-            </a:r>
-            <a:r>
-              <a:rPr sz="1000" b="0">
-                <a:solidFill>
-                  <a:srgbClr val="7A7566"/>
-                </a:solidFill>
-                <a:latin typeface="Apple SD Gothic Neo"/>
-                <a:ea typeface="Apple SD Gothic Neo"/>
-                <a:cs typeface="Apple SD Gothic Neo"/>
-              </a:rPr>
-              <a:t> /</a:t>
-            </a:r>
-            <a:r>
-              <a:rPr sz="1000" b="0">
-                <a:solidFill>
-                  <a:srgbClr val="7A7566"/>
-                </a:solidFill>
-                <a:latin typeface="Apple SD Gothic Neo"/>
-                <a:ea typeface="Apple SD Gothic Neo"/>
-                <a:cs typeface="Apple SD Gothic Neo"/>
-              </a:rPr>
-              <a:t> 10</a:t>
+              <a:t>01 / 11</a:t>
             </a:r>
           </a:p>
         </p:txBody>
@@ -3681,29 +3660,7 @@
                 <a:ea typeface="Apple SD Gothic Neo"/>
                 <a:cs typeface="Apple SD Gothic Neo"/>
               </a:rPr>
-              <a:t>10</a:t>
-            </a:r>
-            <a:r>
-              <a:rPr sz="1000" b="0">
-                <a:solidFill>
-                  <a:srgbClr val="7A7566"/>
-                </a:solidFill>
-                <a:latin typeface="Apple SD Gothic Neo"/>
-                <a:ea typeface="Apple SD Gothic Neo"/>
-                <a:cs typeface="Apple SD Gothic Neo"/>
-              </a:rPr>
-              <a:t> /</a:t>
-            </a:r>
-            <a:r>
-              <a:rPr sz="1000" b="0">
-                <a:solidFill>
-                  <a:srgbClr val="7A7566"/>
-                </a:solidFill>
-                <a:latin typeface="Apple SD Gothic Neo"/>
-                <a:ea typeface="Apple SD Gothic Neo"/>
-                <a:cs typeface="Apple SD Gothic Neo"/>
-              </a:rPr>
-              <a:t> 10</a:t>
+              <a:t>11 / 11</a:t>
             </a:r>
           </a:p>
         </p:txBody>
@@ -3870,40 +3827,7 @@
                 <a:ea typeface="Apple SD Gothic Neo"/>
                 <a:cs typeface="Apple SD Gothic Neo"/>
               </a:rPr>
-              <a:t>암종·치료</a:t>
-            </a:r>
-            <a:r>
-              <a:rPr sz="2400" b="0">
-                <a:solidFill>
-                  <a:srgbClr val="282621"/>
-                </a:solidFill>
-                <a:latin typeface="Apple SD Gothic Neo"/>
-                <a:ea typeface="Apple SD Gothic Neo"/>
-                <a:cs typeface="Apple SD Gothic Neo"/>
-              </a:rPr>
-              <a:t> 단계·드시는</a:t>
-            </a:r>
-            <a:r>
-              <a:rPr sz="2400" b="0">
-                <a:solidFill>
-                  <a:srgbClr val="282621"/>
-                </a:solidFill>
-                <a:latin typeface="Apple SD Gothic Neo"/>
-                <a:ea typeface="Apple SD Gothic Neo"/>
-                <a:cs typeface="Apple SD Gothic Neo"/>
-              </a:rPr>
-              <a:t> 약에</a:t>
-            </a:r>
-            <a:r>
-              <a:rPr sz="2400" b="0">
-                <a:solidFill>
-                  <a:srgbClr val="282621"/>
-                </a:solidFill>
-                <a:latin typeface="Apple SD Gothic Neo"/>
-                <a:ea typeface="Apple SD Gothic Neo"/>
-                <a:cs typeface="Apple SD Gothic Neo"/>
-              </a:rPr>
-              <a:t> 맞춰</a:t>
+              <a:t>암종·치료 단계·드시는 약에 맞춰</a:t>
             </a:r>
           </a:p>
           <a:p>
@@ -3921,62 +3845,7 @@
                 <a:ea typeface="Apple SD Gothic Neo"/>
                 <a:cs typeface="Apple SD Gothic Neo"/>
               </a:rPr>
-              <a:t>하루</a:t>
-            </a:r>
-            <a:r>
-              <a:rPr sz="2400" b="0">
-                <a:solidFill>
-                  <a:srgbClr val="282621"/>
-                </a:solidFill>
-                <a:latin typeface="Apple SD Gothic Neo"/>
-                <a:ea typeface="Apple SD Gothic Neo"/>
-                <a:cs typeface="Apple SD Gothic Neo"/>
-              </a:rPr>
-              <a:t> 세</a:t>
-            </a:r>
-            <a:r>
-              <a:rPr sz="2400" b="0">
-                <a:solidFill>
-                  <a:srgbClr val="282621"/>
-                </a:solidFill>
-                <a:latin typeface="Apple SD Gothic Neo"/>
-                <a:ea typeface="Apple SD Gothic Neo"/>
-                <a:cs typeface="Apple SD Gothic Neo"/>
-              </a:rPr>
-              <a:t> 끼</a:t>
-            </a:r>
-            <a:r>
-              <a:rPr sz="2400" b="0">
-                <a:solidFill>
-                  <a:srgbClr val="282621"/>
-                </a:solidFill>
-                <a:latin typeface="Apple SD Gothic Neo"/>
-                <a:ea typeface="Apple SD Gothic Neo"/>
-                <a:cs typeface="Apple SD Gothic Neo"/>
-              </a:rPr>
-              <a:t> 한식</a:t>
-            </a:r>
-            <a:r>
-              <a:rPr sz="2400" b="0">
-                <a:solidFill>
-                  <a:srgbClr val="282621"/>
-                </a:solidFill>
-                <a:latin typeface="Apple SD Gothic Neo"/>
-                <a:ea typeface="Apple SD Gothic Neo"/>
-                <a:cs typeface="Apple SD Gothic Neo"/>
-              </a:rPr>
-              <a:t> 상차림을</a:t>
-            </a:r>
-            <a:r>
-              <a:rPr sz="2400" b="0">
-                <a:solidFill>
-                  <a:srgbClr val="282621"/>
-                </a:solidFill>
-                <a:latin typeface="Apple SD Gothic Neo"/>
-                <a:ea typeface="Apple SD Gothic Neo"/>
-                <a:cs typeface="Apple SD Gothic Neo"/>
-              </a:rPr>
-              <a:t> 추천합니다</a:t>
+              <a:t>하루 세 끼, 닷새까지 한식 상차림과 장보기 목록을</a:t>
             </a:r>
           </a:p>
         </p:txBody>
@@ -4228,6 +4097,1019 @@
                 <a:cs typeface="Apple SD Gothic Neo"/>
               </a:rPr>
               <a:t>harucharim.com</a:t>
+            </a:r>
+          </a:p>
+        </p:txBody>
+      </p:sp>
+    </p:spTree>
+  </p:cSld>
+  <p:clrMapOvr>
+    <a:masterClrMapping/>
+  </p:clrMapOvr>
+</p:sld>
+</file>
+
+<file path=ppt/slides/slide11.xml><?xml version="1.0" encoding="utf-8"?>
+<p:sld xmlns:a="http://schemas.openxmlformats.org/drawingml/2006/main" xmlns:p="http://schemas.openxmlformats.org/presentationml/2006/main" xmlns:r="http://schemas.openxmlformats.org/officeDocument/2006/relationships">
+  <p:cSld>
+    <p:spTree>
+      <p:nvGrpSpPr>
+        <p:cNvPr id="1" name=""/>
+        <p:cNvGrpSpPr/>
+        <p:nvPr/>
+      </p:nvGrpSpPr>
+      <p:grpSpPr/>
+      <p:sp>
+        <p:nvSpPr>
+          <p:cNvPr id="2" name="Rectangle 1"/>
+          <p:cNvSpPr/>
+          <p:nvPr/>
+        </p:nvSpPr>
+        <p:spPr>
+          <a:xfrm>
+            <a:off x="0" y="0"/>
+            <a:ext cx="9975023" cy="45720"/>
+          </a:xfrm>
+          <a:prstGeom prst="rect">
+            <a:avLst/>
+          </a:prstGeom>
+          <a:solidFill>
+            <a:srgbClr val="4B6936"/>
+          </a:solidFill>
+          <a:ln>
+            <a:noFill/>
+          </a:ln>
+          <a:effectLst/>
+        </p:spPr>
+        <p:style>
+          <a:lnRef idx="1">
+            <a:schemeClr val="accent1"/>
+          </a:lnRef>
+          <a:fillRef idx="3">
+            <a:schemeClr val="accent1"/>
+          </a:fillRef>
+          <a:effectRef idx="2">
+            <a:schemeClr val="accent1"/>
+          </a:effectRef>
+          <a:fontRef idx="minor">
+            <a:schemeClr val="lt1"/>
+          </a:fontRef>
+        </p:style>
+        <p:txBody>
+          <a:bodyPr rtlCol="0" anchor="ctr"/>
+          <a:lstStyle/>
+          <a:p/>
+        </p:txBody>
+      </p:sp>
+      <p:sp>
+        <p:nvSpPr>
+          <p:cNvPr id="3" name="TextBox 2"/>
+          <p:cNvSpPr txBox="1"/>
+          <p:nvPr/>
+        </p:nvSpPr>
+        <p:spPr>
+          <a:xfrm>
+            <a:off x="10362895" y="274320"/>
+            <a:ext cx="1097280" cy="228600"/>
+          </a:xfrm>
+          <a:prstGeom prst="rect">
+            <a:avLst/>
+          </a:prstGeom>
+          <a:noFill/>
+        </p:spPr>
+        <p:txBody>
+          <a:bodyPr wrap="square" lIns="0" rIns="0" tIns="0" bIns="0" anchor="t">
+            <a:noAutofit/>
+          </a:bodyPr>
+          <a:lstStyle/>
+          <a:p>
+            <a:pPr algn="r" eaLnBrk="0">
+              <a:lnSpc>
+                <a:spcPct val="122000"/>
+              </a:lnSpc>
+            </a:pPr>
+            <a:r>
+              <a:rPr sz="1000" b="0">
+                <a:solidFill>
+                  <a:srgbClr val="7A7566"/>
+                </a:solidFill>
+                <a:latin typeface="Apple SD Gothic Neo"/>
+                <a:ea typeface="Apple SD Gothic Neo"/>
+                <a:cs typeface="Apple SD Gothic Neo"/>
+              </a:rPr>
+              <a:t>09 / 11</a:t>
+            </a:r>
+          </a:p>
+        </p:txBody>
+      </p:sp>
+      <p:sp>
+        <p:nvSpPr>
+          <p:cNvPr id="4" name="Rounded Rectangle 3"/>
+          <p:cNvSpPr/>
+          <p:nvPr/>
+        </p:nvSpPr>
+        <p:spPr>
+          <a:xfrm>
+            <a:off x="731520" y="953414"/>
+            <a:ext cx="2472055" cy="431800"/>
+          </a:xfrm>
+          <a:prstGeom prst="roundRect">
+            <a:avLst>
+              <a:gd name="adj" fmla="val 50000"/>
+            </a:avLst>
+          </a:prstGeom>
+          <a:solidFill>
+            <a:srgbClr val="E6ECDB"/>
+          </a:solidFill>
+          <a:ln>
+            <a:noFill/>
+          </a:ln>
+          <a:effectLst/>
+        </p:spPr>
+        <p:style>
+          <a:lnRef idx="1">
+            <a:schemeClr val="accent1"/>
+          </a:lnRef>
+          <a:fillRef idx="3">
+            <a:schemeClr val="accent1"/>
+          </a:fillRef>
+          <a:effectRef idx="2">
+            <a:schemeClr val="accent1"/>
+          </a:effectRef>
+          <a:fontRef idx="minor">
+            <a:schemeClr val="lt1"/>
+          </a:fontRef>
+        </p:style>
+        <p:txBody>
+          <a:bodyPr rtlCol="0" anchor="ctr"/>
+          <a:lstStyle/>
+          <a:p/>
+        </p:txBody>
+      </p:sp>
+      <p:sp>
+        <p:nvSpPr>
+          <p:cNvPr id="5" name="Oval 4"/>
+          <p:cNvSpPr/>
+          <p:nvPr/>
+        </p:nvSpPr>
+        <p:spPr>
+          <a:xfrm>
+            <a:off x="912876" y="1109941"/>
+            <a:ext cx="118745" cy="118745"/>
+          </a:xfrm>
+          <a:prstGeom prst="ellipse">
+            <a:avLst/>
+          </a:prstGeom>
+          <a:solidFill>
+            <a:srgbClr val="4B6936"/>
+          </a:solidFill>
+          <a:ln>
+            <a:noFill/>
+          </a:ln>
+        </p:spPr>
+        <p:style>
+          <a:lnRef idx="1">
+            <a:schemeClr val="accent1"/>
+          </a:lnRef>
+          <a:fillRef idx="3">
+            <a:schemeClr val="accent1"/>
+          </a:fillRef>
+          <a:effectRef idx="2">
+            <a:schemeClr val="accent1"/>
+          </a:effectRef>
+          <a:fontRef idx="minor">
+            <a:schemeClr val="lt1"/>
+          </a:fontRef>
+        </p:style>
+        <p:txBody>
+          <a:bodyPr rtlCol="0" anchor="ctr"/>
+          <a:lstStyle/>
+          <a:p>
+            <a:pPr algn="ctr"/>
+          </a:p>
+        </p:txBody>
+      </p:sp>
+      <p:sp>
+        <p:nvSpPr>
+          <p:cNvPr id="6" name="TextBox 5"/>
+          <p:cNvSpPr txBox="1"/>
+          <p:nvPr/>
+        </p:nvSpPr>
+        <p:spPr>
+          <a:xfrm>
+            <a:off x="1141349" y="953414"/>
+            <a:ext cx="2472055" cy="431800"/>
+          </a:xfrm>
+          <a:prstGeom prst="rect">
+            <a:avLst/>
+          </a:prstGeom>
+          <a:noFill/>
+        </p:spPr>
+        <p:txBody>
+          <a:bodyPr wrap="square" lIns="0" rIns="0" tIns="0" bIns="0" anchor="ctr">
+            <a:noAutofit/>
+          </a:bodyPr>
+          <a:lstStyle/>
+          <a:p>
+            <a:pPr algn="l" eaLnBrk="0">
+              <a:lnSpc>
+                <a:spcPct val="122000"/>
+              </a:lnSpc>
+            </a:pPr>
+            <a:r>
+              <a:rPr sz="1700" b="1">
+                <a:solidFill>
+                  <a:srgbClr val="4B6936"/>
+                </a:solidFill>
+                <a:latin typeface="Apple SD Gothic Neo"/>
+                <a:ea typeface="Apple SD Gothic Neo"/>
+                <a:cs typeface="Apple SD Gothic Neo"/>
+              </a:rPr>
+              <a:t>이렇게 쓰실 수 있습니다</a:t>
+            </a:r>
+          </a:p>
+        </p:txBody>
+      </p:sp>
+      <p:sp>
+        <p:nvSpPr>
+          <p:cNvPr id="7" name="Rectangle 6"/>
+          <p:cNvSpPr/>
+          <p:nvPr/>
+        </p:nvSpPr>
+        <p:spPr>
+          <a:xfrm>
+            <a:off x="731520" y="2023262"/>
+            <a:ext cx="3301898" cy="54864"/>
+          </a:xfrm>
+          <a:prstGeom prst="rect">
+            <a:avLst/>
+          </a:prstGeom>
+          <a:solidFill>
+            <a:srgbClr val="4B6936"/>
+          </a:solidFill>
+          <a:ln>
+            <a:noFill/>
+          </a:ln>
+          <a:effectLst/>
+        </p:spPr>
+        <p:style>
+          <a:lnRef idx="1">
+            <a:schemeClr val="accent1"/>
+          </a:lnRef>
+          <a:fillRef idx="3">
+            <a:schemeClr val="accent1"/>
+          </a:fillRef>
+          <a:effectRef idx="2">
+            <a:schemeClr val="accent1"/>
+          </a:effectRef>
+          <a:fontRef idx="minor">
+            <a:schemeClr val="lt1"/>
+          </a:fontRef>
+        </p:style>
+        <p:txBody>
+          <a:bodyPr rtlCol="0" anchor="ctr"/>
+          <a:lstStyle/>
+          <a:p/>
+        </p:txBody>
+      </p:sp>
+      <p:sp>
+        <p:nvSpPr>
+          <p:cNvPr id="8" name="TextBox 7"/>
+          <p:cNvSpPr txBox="1"/>
+          <p:nvPr/>
+        </p:nvSpPr>
+        <p:spPr>
+          <a:xfrm>
+            <a:off x="731520" y="2297582"/>
+            <a:ext cx="3301898" cy="365760"/>
+          </a:xfrm>
+          <a:prstGeom prst="rect">
+            <a:avLst/>
+          </a:prstGeom>
+          <a:noFill/>
+        </p:spPr>
+        <p:txBody>
+          <a:bodyPr wrap="square" lIns="0" rIns="0" tIns="0" bIns="0" anchor="t">
+            <a:noAutofit/>
+          </a:bodyPr>
+          <a:lstStyle/>
+          <a:p>
+            <a:pPr algn="l" eaLnBrk="0">
+              <a:lnSpc>
+                <a:spcPct val="122000"/>
+              </a:lnSpc>
+            </a:pPr>
+            <a:r>
+              <a:rPr sz="1900" b="1">
+                <a:solidFill>
+                  <a:srgbClr val="4B6936"/>
+                </a:solidFill>
+                <a:latin typeface="Apple SD Gothic Neo"/>
+                <a:ea typeface="Apple SD Gothic Neo"/>
+                <a:cs typeface="Apple SD Gothic Neo"/>
+              </a:rPr>
+              <a:t>먹고 싶은 것 먼저</a:t>
+            </a:r>
+          </a:p>
+        </p:txBody>
+      </p:sp>
+      <p:sp>
+        <p:nvSpPr>
+          <p:cNvPr id="9" name="TextBox 8"/>
+          <p:cNvSpPr txBox="1"/>
+          <p:nvPr/>
+        </p:nvSpPr>
+        <p:spPr>
+          <a:xfrm>
+            <a:off x="731520" y="3102254"/>
+            <a:ext cx="3576218" cy="670560"/>
+          </a:xfrm>
+          <a:prstGeom prst="rect">
+            <a:avLst/>
+          </a:prstGeom>
+          <a:noFill/>
+        </p:spPr>
+        <p:txBody>
+          <a:bodyPr wrap="square" lIns="0" rIns="0" tIns="0" bIns="0" anchor="b">
+            <a:noAutofit/>
+          </a:bodyPr>
+          <a:lstStyle/>
+          <a:p>
+            <a:pPr algn="l" eaLnBrk="0">
+              <a:lnSpc>
+                <a:spcPct val="100000"/>
+              </a:lnSpc>
+            </a:pPr>
+            <a:r>
+              <a:rPr sz="4400" b="1">
+                <a:solidFill>
+                  <a:srgbClr val="324326"/>
+                </a:solidFill>
+                <a:latin typeface="Apple SD Gothic Neo"/>
+                <a:ea typeface="Apple SD Gothic Neo"/>
+                <a:cs typeface="Apple SD Gothic Neo"/>
+              </a:rPr>
+              <a:t>내가 고르고</a:t>
+            </a:r>
+          </a:p>
+        </p:txBody>
+      </p:sp>
+      <p:sp>
+        <p:nvSpPr>
+          <p:cNvPr id="10" name="TextBox 9"/>
+          <p:cNvSpPr txBox="1"/>
+          <p:nvPr/>
+        </p:nvSpPr>
+        <p:spPr>
+          <a:xfrm>
+            <a:off x="731520" y="4001414"/>
+            <a:ext cx="3301898" cy="446227"/>
+          </a:xfrm>
+          <a:prstGeom prst="rect">
+            <a:avLst/>
+          </a:prstGeom>
+          <a:noFill/>
+        </p:spPr>
+        <p:txBody>
+          <a:bodyPr wrap="square" lIns="0" rIns="0" tIns="0" bIns="0" anchor="t">
+            <a:noAutofit/>
+          </a:bodyPr>
+          <a:lstStyle/>
+          <a:p>
+            <a:pPr algn="l" eaLnBrk="0">
+              <a:lnSpc>
+                <a:spcPct val="122000"/>
+              </a:lnSpc>
+            </a:pPr>
+            <a:r>
+              <a:rPr sz="2400" b="1">
+                <a:solidFill>
+                  <a:srgbClr val="282621"/>
+                </a:solidFill>
+                <a:latin typeface="Apple SD Gothic Neo"/>
+                <a:ea typeface="Apple SD Gothic Neo"/>
+                <a:cs typeface="Apple SD Gothic Neo"/>
+              </a:rPr>
+              <a:t>나머지는 추천받습니다</a:t>
+            </a:r>
+          </a:p>
+        </p:txBody>
+      </p:sp>
+      <p:sp>
+        <p:nvSpPr>
+          <p:cNvPr id="11" name="TextBox 10"/>
+          <p:cNvSpPr txBox="1"/>
+          <p:nvPr/>
+        </p:nvSpPr>
+        <p:spPr>
+          <a:xfrm>
+            <a:off x="731520" y="4584801"/>
+            <a:ext cx="3301898" cy="725423"/>
+          </a:xfrm>
+          <a:prstGeom prst="rect">
+            <a:avLst/>
+          </a:prstGeom>
+          <a:noFill/>
+        </p:spPr>
+        <p:txBody>
+          <a:bodyPr wrap="square" lIns="0" rIns="0" tIns="0" bIns="0" anchor="t">
+            <a:noAutofit/>
+          </a:bodyPr>
+          <a:lstStyle/>
+          <a:p>
+            <a:pPr algn="l" eaLnBrk="0">
+              <a:lnSpc>
+                <a:spcPct val="140000"/>
+              </a:lnSpc>
+            </a:pPr>
+            <a:r>
+              <a:rPr sz="1700" b="0">
+                <a:solidFill>
+                  <a:srgbClr val="48453C"/>
+                </a:solidFill>
+                <a:latin typeface="Apple SD Gothic Neo"/>
+                <a:ea typeface="Apple SD Gothic Neo"/>
+                <a:cs typeface="Apple SD Gothic Neo"/>
+              </a:rPr>
+              <a:t>담은 것은 두고 빈자리만 채웁니다</a:t>
+            </a:r>
+            <a:br/>
+          </a:p>
+        </p:txBody>
+      </p:sp>
+      <p:sp>
+        <p:nvSpPr>
+          <p:cNvPr id="12" name="Rectangle 11"/>
+          <p:cNvSpPr/>
+          <p:nvPr/>
+        </p:nvSpPr>
+        <p:spPr>
+          <a:xfrm>
+            <a:off x="4444898" y="2023262"/>
+            <a:ext cx="3301898" cy="54864"/>
+          </a:xfrm>
+          <a:prstGeom prst="rect">
+            <a:avLst/>
+          </a:prstGeom>
+          <a:solidFill>
+            <a:srgbClr val="4B6936"/>
+          </a:solidFill>
+          <a:ln>
+            <a:noFill/>
+          </a:ln>
+          <a:effectLst/>
+        </p:spPr>
+        <p:style>
+          <a:lnRef idx="1">
+            <a:schemeClr val="accent1"/>
+          </a:lnRef>
+          <a:fillRef idx="3">
+            <a:schemeClr val="accent1"/>
+          </a:fillRef>
+          <a:effectRef idx="2">
+            <a:schemeClr val="accent1"/>
+          </a:effectRef>
+          <a:fontRef idx="minor">
+            <a:schemeClr val="lt1"/>
+          </a:fontRef>
+        </p:style>
+        <p:txBody>
+          <a:bodyPr rtlCol="0" anchor="ctr"/>
+          <a:lstStyle/>
+          <a:p/>
+        </p:txBody>
+      </p:sp>
+      <p:sp>
+        <p:nvSpPr>
+          <p:cNvPr id="13" name="TextBox 12"/>
+          <p:cNvSpPr txBox="1"/>
+          <p:nvPr/>
+        </p:nvSpPr>
+        <p:spPr>
+          <a:xfrm>
+            <a:off x="4444898" y="2297582"/>
+            <a:ext cx="3301898" cy="365760"/>
+          </a:xfrm>
+          <a:prstGeom prst="rect">
+            <a:avLst/>
+          </a:prstGeom>
+          <a:noFill/>
+        </p:spPr>
+        <p:txBody>
+          <a:bodyPr wrap="square" lIns="0" rIns="0" tIns="0" bIns="0" anchor="t">
+            <a:noAutofit/>
+          </a:bodyPr>
+          <a:lstStyle/>
+          <a:p>
+            <a:pPr algn="l" eaLnBrk="0">
+              <a:lnSpc>
+                <a:spcPct val="122000"/>
+              </a:lnSpc>
+            </a:pPr>
+            <a:r>
+              <a:rPr sz="1900" b="1">
+                <a:solidFill>
+                  <a:srgbClr val="4B6936"/>
+                </a:solidFill>
+                <a:latin typeface="Apple SD Gothic Neo"/>
+                <a:ea typeface="Apple SD Gothic Neo"/>
+                <a:cs typeface="Apple SD Gothic Neo"/>
+              </a:rPr>
+              <a:t>장보기까지 한 번에</a:t>
+            </a:r>
+          </a:p>
+        </p:txBody>
+      </p:sp>
+      <p:sp>
+        <p:nvSpPr>
+          <p:cNvPr id="14" name="TextBox 13"/>
+          <p:cNvSpPr txBox="1"/>
+          <p:nvPr/>
+        </p:nvSpPr>
+        <p:spPr>
+          <a:xfrm>
+            <a:off x="4444898" y="3102254"/>
+            <a:ext cx="3576218" cy="670560"/>
+          </a:xfrm>
+          <a:prstGeom prst="rect">
+            <a:avLst/>
+          </a:prstGeom>
+          <a:noFill/>
+        </p:spPr>
+        <p:txBody>
+          <a:bodyPr wrap="square" lIns="0" rIns="0" tIns="0" bIns="0" anchor="b">
+            <a:noAutofit/>
+          </a:bodyPr>
+          <a:lstStyle/>
+          <a:p>
+            <a:pPr algn="l" eaLnBrk="0">
+              <a:lnSpc>
+                <a:spcPct val="100000"/>
+              </a:lnSpc>
+            </a:pPr>
+            <a:r>
+              <a:rPr sz="4800" b="1">
+                <a:solidFill>
+                  <a:srgbClr val="324326"/>
+                </a:solidFill>
+                <a:latin typeface="Apple SD Gothic Neo"/>
+                <a:ea typeface="Apple SD Gothic Neo"/>
+                <a:cs typeface="Apple SD Gothic Neo"/>
+              </a:rPr>
+              <a:t>5일치</a:t>
+            </a:r>
+          </a:p>
+        </p:txBody>
+      </p:sp>
+      <p:sp>
+        <p:nvSpPr>
+          <p:cNvPr id="15" name="TextBox 14"/>
+          <p:cNvSpPr txBox="1"/>
+          <p:nvPr/>
+        </p:nvSpPr>
+        <p:spPr>
+          <a:xfrm>
+            <a:off x="4444898" y="4001414"/>
+            <a:ext cx="3301898" cy="446227"/>
+          </a:xfrm>
+          <a:prstGeom prst="rect">
+            <a:avLst/>
+          </a:prstGeom>
+          <a:noFill/>
+        </p:spPr>
+        <p:txBody>
+          <a:bodyPr wrap="square" lIns="0" rIns="0" tIns="0" bIns="0" anchor="t">
+            <a:noAutofit/>
+          </a:bodyPr>
+          <a:lstStyle/>
+          <a:p>
+            <a:pPr algn="l" eaLnBrk="0">
+              <a:lnSpc>
+                <a:spcPct val="122000"/>
+              </a:lnSpc>
+            </a:pPr>
+            <a:r>
+              <a:rPr sz="2400" b="1">
+                <a:solidFill>
+                  <a:srgbClr val="282621"/>
+                </a:solidFill>
+                <a:latin typeface="Apple SD Gothic Neo"/>
+                <a:ea typeface="Apple SD Gothic Neo"/>
+                <a:cs typeface="Apple SD Gothic Neo"/>
+              </a:rPr>
+              <a:t>1인분 장보기 목록이 따라옵니다</a:t>
+            </a:r>
+          </a:p>
+        </p:txBody>
+      </p:sp>
+      <p:sp>
+        <p:nvSpPr>
+          <p:cNvPr id="16" name="TextBox 15"/>
+          <p:cNvSpPr txBox="1"/>
+          <p:nvPr/>
+        </p:nvSpPr>
+        <p:spPr>
+          <a:xfrm>
+            <a:off x="4444898" y="4584801"/>
+            <a:ext cx="3301898" cy="725423"/>
+          </a:xfrm>
+          <a:prstGeom prst="rect">
+            <a:avLst/>
+          </a:prstGeom>
+          <a:noFill/>
+        </p:spPr>
+        <p:txBody>
+          <a:bodyPr wrap="square" lIns="0" rIns="0" tIns="0" bIns="0" anchor="t">
+            <a:noAutofit/>
+          </a:bodyPr>
+          <a:lstStyle/>
+          <a:p>
+            <a:pPr algn="l" eaLnBrk="0">
+              <a:lnSpc>
+                <a:spcPct val="140000"/>
+              </a:lnSpc>
+            </a:pPr>
+            <a:r>
+              <a:rPr sz="1700" b="0">
+                <a:solidFill>
+                  <a:srgbClr val="48453C"/>
+                </a:solidFill>
+                <a:latin typeface="Apple SD Gothic Neo"/>
+                <a:ea typeface="Apple SD Gothic Neo"/>
+                <a:cs typeface="Apple SD Gothic Neo"/>
+              </a:rPr>
+              <a:t>식단표는 냉장고 그림 · 인쇄는 A4 한 장</a:t>
+            </a:r>
+          </a:p>
+        </p:txBody>
+      </p:sp>
+      <p:sp>
+        <p:nvSpPr>
+          <p:cNvPr id="17" name="Rectangle 16"/>
+          <p:cNvSpPr/>
+          <p:nvPr/>
+        </p:nvSpPr>
+        <p:spPr>
+          <a:xfrm>
+            <a:off x="8158276" y="2023262"/>
+            <a:ext cx="3301898" cy="54864"/>
+          </a:xfrm>
+          <a:prstGeom prst="rect">
+            <a:avLst/>
+          </a:prstGeom>
+          <a:solidFill>
+            <a:srgbClr val="4B6936"/>
+          </a:solidFill>
+          <a:ln>
+            <a:noFill/>
+          </a:ln>
+          <a:effectLst/>
+        </p:spPr>
+        <p:style>
+          <a:lnRef idx="1">
+            <a:schemeClr val="accent1"/>
+          </a:lnRef>
+          <a:fillRef idx="3">
+            <a:schemeClr val="accent1"/>
+          </a:fillRef>
+          <a:effectRef idx="2">
+            <a:schemeClr val="accent1"/>
+          </a:effectRef>
+          <a:fontRef idx="minor">
+            <a:schemeClr val="lt1"/>
+          </a:fontRef>
+        </p:style>
+        <p:txBody>
+          <a:bodyPr rtlCol="0" anchor="ctr"/>
+          <a:lstStyle/>
+          <a:p/>
+        </p:txBody>
+      </p:sp>
+      <p:sp>
+        <p:nvSpPr>
+          <p:cNvPr id="18" name="TextBox 17"/>
+          <p:cNvSpPr txBox="1"/>
+          <p:nvPr/>
+        </p:nvSpPr>
+        <p:spPr>
+          <a:xfrm>
+            <a:off x="8158276" y="2297582"/>
+            <a:ext cx="3301898" cy="365760"/>
+          </a:xfrm>
+          <a:prstGeom prst="rect">
+            <a:avLst/>
+          </a:prstGeom>
+          <a:noFill/>
+        </p:spPr>
+        <p:txBody>
+          <a:bodyPr wrap="square" lIns="0" rIns="0" tIns="0" bIns="0" anchor="t">
+            <a:noAutofit/>
+          </a:bodyPr>
+          <a:lstStyle/>
+          <a:p>
+            <a:pPr algn="l" eaLnBrk="0">
+              <a:lnSpc>
+                <a:spcPct val="122000"/>
+              </a:lnSpc>
+            </a:pPr>
+            <a:r>
+              <a:rPr sz="1900" b="1">
+                <a:solidFill>
+                  <a:srgbClr val="4B6936"/>
+                </a:solidFill>
+                <a:latin typeface="Apple SD Gothic Neo"/>
+                <a:ea typeface="Apple SD Gothic Neo"/>
+                <a:cs typeface="Apple SD Gothic Neo"/>
+              </a:rPr>
+              <a:t>처음이라도</a:t>
+            </a:r>
+          </a:p>
+        </p:txBody>
+      </p:sp>
+      <p:sp>
+        <p:nvSpPr>
+          <p:cNvPr id="19" name="TextBox 18"/>
+          <p:cNvSpPr txBox="1"/>
+          <p:nvPr/>
+        </p:nvSpPr>
+        <p:spPr>
+          <a:xfrm>
+            <a:off x="8158276" y="2754782"/>
+            <a:ext cx="3301898" cy="292608"/>
+          </a:xfrm>
+          <a:prstGeom prst="rect">
+            <a:avLst/>
+          </a:prstGeom>
+          <a:noFill/>
+        </p:spPr>
+        <p:txBody>
+          <a:bodyPr wrap="square" lIns="0" rIns="0" tIns="0" bIns="0" anchor="t">
+            <a:noAutofit/>
+          </a:bodyPr>
+          <a:lstStyle/>
+          <a:p>
+            <a:pPr algn="l" eaLnBrk="0">
+              <a:lnSpc>
+                <a:spcPct val="122000"/>
+              </a:lnSpc>
+            </a:pPr>
+            <a:r>
+              <a:rPr sz="1600" b="1">
+                <a:solidFill>
+                  <a:srgbClr val="48453C"/>
+                </a:solidFill>
+                <a:latin typeface="Apple SD Gothic Neo"/>
+                <a:ea typeface="Apple SD Gothic Neo"/>
+                <a:cs typeface="Apple SD Gothic Neo"/>
+              </a:rPr>
+              <a:t/>
+            </a:r>
+          </a:p>
+        </p:txBody>
+      </p:sp>
+      <p:sp>
+        <p:nvSpPr>
+          <p:cNvPr id="20" name="TextBox 19"/>
+          <p:cNvSpPr txBox="1"/>
+          <p:nvPr/>
+        </p:nvSpPr>
+        <p:spPr>
+          <a:xfrm>
+            <a:off x="8158276" y="3102254"/>
+            <a:ext cx="3576218" cy="670560"/>
+          </a:xfrm>
+          <a:prstGeom prst="rect">
+            <a:avLst/>
+          </a:prstGeom>
+          <a:noFill/>
+        </p:spPr>
+        <p:txBody>
+          <a:bodyPr wrap="square" lIns="0" rIns="0" tIns="0" bIns="0" anchor="b">
+            <a:noAutofit/>
+          </a:bodyPr>
+          <a:lstStyle/>
+          <a:p>
+            <a:pPr algn="l" eaLnBrk="0">
+              <a:lnSpc>
+                <a:spcPct val="100000"/>
+              </a:lnSpc>
+            </a:pPr>
+            <a:r>
+              <a:rPr sz="3600" b="1">
+                <a:solidFill>
+                  <a:srgbClr val="324326"/>
+                </a:solidFill>
+                <a:latin typeface="Apple SD Gothic Neo"/>
+                <a:ea typeface="Apple SD Gothic Neo"/>
+                <a:cs typeface="Apple SD Gothic Neo"/>
+              </a:rPr>
+              <a:t>움직이는 사용법</a:t>
+            </a:r>
+          </a:p>
+        </p:txBody>
+      </p:sp>
+      <p:sp>
+        <p:nvSpPr>
+          <p:cNvPr id="21" name="TextBox 20"/>
+          <p:cNvSpPr txBox="1"/>
+          <p:nvPr/>
+        </p:nvSpPr>
+        <p:spPr>
+          <a:xfrm>
+            <a:off x="8158276" y="4001414"/>
+            <a:ext cx="3301898" cy="446227"/>
+          </a:xfrm>
+          <a:prstGeom prst="rect">
+            <a:avLst/>
+          </a:prstGeom>
+          <a:noFill/>
+        </p:spPr>
+        <p:txBody>
+          <a:bodyPr wrap="square" lIns="0" rIns="0" tIns="0" bIns="0" anchor="t">
+            <a:noAutofit/>
+          </a:bodyPr>
+          <a:lstStyle/>
+          <a:p>
+            <a:pPr algn="l" eaLnBrk="0">
+              <a:lnSpc>
+                <a:spcPct val="122000"/>
+              </a:lnSpc>
+            </a:pPr>
+            <a:r>
+              <a:rPr sz="2400" b="1">
+                <a:solidFill>
+                  <a:srgbClr val="282621"/>
+                </a:solidFill>
+                <a:latin typeface="Apple SD Gothic Neo"/>
+                <a:ea typeface="Apple SD Gothic Neo"/>
+                <a:cs typeface="Apple SD Gothic Neo"/>
+              </a:rPr>
+              <a:t>손가락이 눌러 가며 보여 드립니다</a:t>
+            </a:r>
+          </a:p>
+        </p:txBody>
+      </p:sp>
+      <p:sp>
+        <p:nvSpPr>
+          <p:cNvPr id="22" name="TextBox 21"/>
+          <p:cNvSpPr txBox="1"/>
+          <p:nvPr/>
+        </p:nvSpPr>
+        <p:spPr>
+          <a:xfrm>
+            <a:off x="8158276" y="4584801"/>
+            <a:ext cx="3301898" cy="725423"/>
+          </a:xfrm>
+          <a:prstGeom prst="rect">
+            <a:avLst/>
+          </a:prstGeom>
+          <a:noFill/>
+        </p:spPr>
+        <p:txBody>
+          <a:bodyPr wrap="square" lIns="0" rIns="0" tIns="0" bIns="0" anchor="t">
+            <a:noAutofit/>
+          </a:bodyPr>
+          <a:lstStyle/>
+          <a:p>
+            <a:pPr algn="l" eaLnBrk="0">
+              <a:lnSpc>
+                <a:spcPct val="140000"/>
+              </a:lnSpc>
+            </a:pPr>
+            <a:r>
+              <a:rPr sz="1700" b="0">
+                <a:solidFill>
+                  <a:srgbClr val="48453C"/>
+                </a:solidFill>
+                <a:latin typeface="Apple SD Gothic Neo"/>
+                <a:ea typeface="Apple SD Gothic Neo"/>
+                <a:cs typeface="Apple SD Gothic Neo"/>
+              </a:rPr>
+              <a:t>음성 안내 · 글자 더 크게</a:t>
+            </a:r>
+          </a:p>
+        </p:txBody>
+      </p:sp>
+      <p:sp>
+        <p:nvSpPr>
+          <p:cNvPr id="23" name="Rectangle 22"/>
+          <p:cNvSpPr/>
+          <p:nvPr/>
+        </p:nvSpPr>
+        <p:spPr>
+          <a:xfrm>
+            <a:off x="731520" y="6245352"/>
+            <a:ext cx="10728655" cy="10972"/>
+          </a:xfrm>
+          <a:prstGeom prst="rect">
+            <a:avLst/>
+          </a:prstGeom>
+          <a:solidFill>
+            <a:srgbClr val="E2DFD3"/>
+          </a:solidFill>
+          <a:ln>
+            <a:noFill/>
+          </a:ln>
+          <a:effectLst/>
+        </p:spPr>
+        <p:style>
+          <a:lnRef idx="1">
+            <a:schemeClr val="accent1"/>
+          </a:lnRef>
+          <a:fillRef idx="3">
+            <a:schemeClr val="accent1"/>
+          </a:fillRef>
+          <a:effectRef idx="2">
+            <a:schemeClr val="accent1"/>
+          </a:effectRef>
+          <a:fontRef idx="minor">
+            <a:schemeClr val="lt1"/>
+          </a:fontRef>
+        </p:style>
+        <p:txBody>
+          <a:bodyPr rtlCol="0" anchor="ctr"/>
+          <a:lstStyle/>
+          <a:p/>
+        </p:txBody>
+      </p:sp>
+      <p:sp>
+        <p:nvSpPr>
+          <p:cNvPr id="24" name="TextBox 23"/>
+          <p:cNvSpPr txBox="1"/>
+          <p:nvPr/>
+        </p:nvSpPr>
+        <p:spPr>
+          <a:xfrm>
+            <a:off x="731520" y="6336792"/>
+            <a:ext cx="2926080" cy="228600"/>
+          </a:xfrm>
+          <a:prstGeom prst="rect">
+            <a:avLst/>
+          </a:prstGeom>
+          <a:noFill/>
+        </p:spPr>
+        <p:txBody>
+          <a:bodyPr wrap="square" lIns="0" rIns="0" tIns="0" bIns="0" anchor="t">
+            <a:noAutofit/>
+          </a:bodyPr>
+          <a:lstStyle/>
+          <a:p>
+            <a:pPr algn="l" eaLnBrk="0">
+              <a:lnSpc>
+                <a:spcPct val="122000"/>
+              </a:lnSpc>
+            </a:pPr>
+            <a:r>
+              <a:rPr sz="1000" b="1">
+                <a:solidFill>
+                  <a:srgbClr val="4B6936"/>
+                </a:solidFill>
+                <a:latin typeface="Apple SD Gothic Neo"/>
+                <a:ea typeface="Apple SD Gothic Neo"/>
+                <a:cs typeface="Apple SD Gothic Neo"/>
+              </a:rPr>
+              <a:t>이렇게 쓰실 수 있습니다</a:t>
+            </a:r>
+          </a:p>
+        </p:txBody>
+      </p:sp>
+      <p:sp>
+        <p:nvSpPr>
+          <p:cNvPr id="25" name="TextBox 24"/>
+          <p:cNvSpPr txBox="1"/>
+          <p:nvPr/>
+        </p:nvSpPr>
+        <p:spPr>
+          <a:xfrm>
+            <a:off x="3749039" y="6336792"/>
+            <a:ext cx="7711135" cy="228600"/>
+          </a:xfrm>
+          <a:prstGeom prst="rect">
+            <a:avLst/>
+          </a:prstGeom>
+          <a:noFill/>
+        </p:spPr>
+        <p:txBody>
+          <a:bodyPr wrap="square" lIns="0" rIns="0" tIns="0" bIns="0" anchor="t">
+            <a:noAutofit/>
+          </a:bodyPr>
+          <a:lstStyle/>
+          <a:p>
+            <a:pPr algn="r" eaLnBrk="0">
+              <a:lnSpc>
+                <a:spcPct val="122000"/>
+              </a:lnSpc>
+            </a:pPr>
+            <a:r>
+              <a:rPr sz="1000" b="0">
+                <a:solidFill>
+                  <a:srgbClr val="7A7566"/>
+                </a:solidFill>
+                <a:latin typeface="Apple SD Gothic Neo"/>
+                <a:ea typeface="Apple SD Gothic Neo"/>
+                <a:cs typeface="Apple SD Gothic Neo"/>
+              </a:rPr>
+              <a:t>가이드 → 사용법에서 언제든 다시 보실 수 있습니다 · 집에 있는 재료는 장보기에서 빠집니다</a:t>
             </a:r>
           </a:p>
         </p:txBody>
@@ -4267,7 +5149,7 @@
         <p:spPr>
           <a:xfrm>
             <a:off x="0" y="0"/>
-            <a:ext cx="2438339" cy="45720"/>
+            <a:ext cx="2216671" cy="45720"/>
           </a:xfrm>
           <a:prstGeom prst="rect">
             <a:avLst/>
@@ -4336,29 +5218,7 @@
                 <a:ea typeface="Apple SD Gothic Neo"/>
                 <a:cs typeface="Apple SD Gothic Neo"/>
               </a:rPr>
-              <a:t>02</a:t>
-            </a:r>
-            <a:r>
-              <a:rPr sz="1000" b="0">
-                <a:solidFill>
-                  <a:srgbClr val="7A7566"/>
-                </a:solidFill>
-                <a:latin typeface="Apple SD Gothic Neo"/>
-                <a:ea typeface="Apple SD Gothic Neo"/>
-                <a:cs typeface="Apple SD Gothic Neo"/>
-              </a:rPr>
-              <a:t> /</a:t>
-            </a:r>
-            <a:r>
-              <a:rPr sz="1000" b="0">
-                <a:solidFill>
-                  <a:srgbClr val="7A7566"/>
-                </a:solidFill>
-                <a:latin typeface="Apple SD Gothic Neo"/>
-                <a:ea typeface="Apple SD Gothic Neo"/>
-                <a:cs typeface="Apple SD Gothic Neo"/>
-              </a:rPr>
-              <a:t> 10</a:t>
+              <a:t>02 / 11</a:t>
             </a:r>
           </a:p>
         </p:txBody>
@@ -5204,7 +6064,7 @@
         <p:spPr>
           <a:xfrm>
             <a:off x="0" y="0"/>
-            <a:ext cx="3657508" cy="45720"/>
+            <a:ext cx="3325007" cy="45720"/>
           </a:xfrm>
           <a:prstGeom prst="rect">
             <a:avLst/>
@@ -5273,29 +6133,7 @@
                 <a:ea typeface="Apple SD Gothic Neo"/>
                 <a:cs typeface="Apple SD Gothic Neo"/>
               </a:rPr>
-              <a:t>03</a:t>
-            </a:r>
-            <a:r>
-              <a:rPr sz="1000" b="0">
-                <a:solidFill>
-                  <a:srgbClr val="7A7566"/>
-                </a:solidFill>
-                <a:latin typeface="Apple SD Gothic Neo"/>
-                <a:ea typeface="Apple SD Gothic Neo"/>
-                <a:cs typeface="Apple SD Gothic Neo"/>
-              </a:rPr>
-              <a:t> /</a:t>
-            </a:r>
-            <a:r>
-              <a:rPr sz="1000" b="0">
-                <a:solidFill>
-                  <a:srgbClr val="7A7566"/>
-                </a:solidFill>
-                <a:latin typeface="Apple SD Gothic Neo"/>
-                <a:ea typeface="Apple SD Gothic Neo"/>
-                <a:cs typeface="Apple SD Gothic Neo"/>
-              </a:rPr>
-              <a:t> 10</a:t>
+              <a:t>03 / 11</a:t>
             </a:r>
           </a:p>
         </p:txBody>
@@ -6764,7 +7602,7 @@
         <p:spPr>
           <a:xfrm>
             <a:off x="0" y="0"/>
-            <a:ext cx="4876678" cy="45720"/>
+            <a:ext cx="4433343" cy="45720"/>
           </a:xfrm>
           <a:prstGeom prst="rect">
             <a:avLst/>
@@ -6833,29 +7671,7 @@
                 <a:ea typeface="Apple SD Gothic Neo"/>
                 <a:cs typeface="Apple SD Gothic Neo"/>
               </a:rPr>
-              <a:t>04</a:t>
-            </a:r>
-            <a:r>
-              <a:rPr sz="1000" b="0">
-                <a:solidFill>
-                  <a:srgbClr val="7A7566"/>
-                </a:solidFill>
-                <a:latin typeface="Apple SD Gothic Neo"/>
-                <a:ea typeface="Apple SD Gothic Neo"/>
-                <a:cs typeface="Apple SD Gothic Neo"/>
-              </a:rPr>
-              <a:t> /</a:t>
-            </a:r>
-            <a:r>
-              <a:rPr sz="1000" b="0">
-                <a:solidFill>
-                  <a:srgbClr val="7A7566"/>
-                </a:solidFill>
-                <a:latin typeface="Apple SD Gothic Neo"/>
-                <a:ea typeface="Apple SD Gothic Neo"/>
-                <a:cs typeface="Apple SD Gothic Neo"/>
-              </a:rPr>
-              <a:t> 10</a:t>
+              <a:t>04 / 11</a:t>
             </a:r>
           </a:p>
         </p:txBody>
@@ -7900,7 +8716,7 @@
         <p:spPr>
           <a:xfrm>
             <a:off x="0" y="0"/>
-            <a:ext cx="6095847" cy="45720"/>
+            <a:ext cx="5541679" cy="45720"/>
           </a:xfrm>
           <a:prstGeom prst="rect">
             <a:avLst/>
@@ -7969,29 +8785,7 @@
                 <a:ea typeface="Apple SD Gothic Neo"/>
                 <a:cs typeface="Apple SD Gothic Neo"/>
               </a:rPr>
-              <a:t>05</a:t>
-            </a:r>
-            <a:r>
-              <a:rPr sz="1000" b="0">
-                <a:solidFill>
-                  <a:srgbClr val="7A7566"/>
-                </a:solidFill>
-                <a:latin typeface="Apple SD Gothic Neo"/>
-                <a:ea typeface="Apple SD Gothic Neo"/>
-                <a:cs typeface="Apple SD Gothic Neo"/>
-              </a:rPr>
-              <a:t> /</a:t>
-            </a:r>
-            <a:r>
-              <a:rPr sz="1000" b="0">
-                <a:solidFill>
-                  <a:srgbClr val="7A7566"/>
-                </a:solidFill>
-                <a:latin typeface="Apple SD Gothic Neo"/>
-                <a:ea typeface="Apple SD Gothic Neo"/>
-                <a:cs typeface="Apple SD Gothic Neo"/>
-              </a:rPr>
-              <a:t> 10</a:t>
+              <a:t>05 / 11</a:t>
             </a:r>
           </a:p>
         </p:txBody>
@@ -9166,7 +9960,7 @@
         <p:spPr>
           <a:xfrm>
             <a:off x="0" y="0"/>
-            <a:ext cx="7315017" cy="45720"/>
+            <a:ext cx="6650015" cy="45720"/>
           </a:xfrm>
           <a:prstGeom prst="rect">
             <a:avLst/>
@@ -9235,29 +10029,7 @@
                 <a:ea typeface="Apple SD Gothic Neo"/>
                 <a:cs typeface="Apple SD Gothic Neo"/>
               </a:rPr>
-              <a:t>06</a:t>
-            </a:r>
-            <a:r>
-              <a:rPr sz="1000" b="0">
-                <a:solidFill>
-                  <a:srgbClr val="7A7566"/>
-                </a:solidFill>
-                <a:latin typeface="Apple SD Gothic Neo"/>
-                <a:ea typeface="Apple SD Gothic Neo"/>
-                <a:cs typeface="Apple SD Gothic Neo"/>
-              </a:rPr>
-              <a:t> /</a:t>
-            </a:r>
-            <a:r>
-              <a:rPr sz="1000" b="0">
-                <a:solidFill>
-                  <a:srgbClr val="7A7566"/>
-                </a:solidFill>
-                <a:latin typeface="Apple SD Gothic Neo"/>
-                <a:ea typeface="Apple SD Gothic Neo"/>
-                <a:cs typeface="Apple SD Gothic Neo"/>
-              </a:rPr>
-              <a:t> 10</a:t>
+              <a:t>06 / 11</a:t>
             </a:r>
           </a:p>
         </p:txBody>
@@ -9892,7 +10664,7 @@
         <p:spPr>
           <a:xfrm>
             <a:off x="0" y="0"/>
-            <a:ext cx="8534186" cy="45720"/>
+            <a:ext cx="7758351" cy="45720"/>
           </a:xfrm>
           <a:prstGeom prst="rect">
             <a:avLst/>
@@ -9961,29 +10733,7 @@
                 <a:ea typeface="Apple SD Gothic Neo"/>
                 <a:cs typeface="Apple SD Gothic Neo"/>
               </a:rPr>
-              <a:t>07</a:t>
-            </a:r>
-            <a:r>
-              <a:rPr sz="1000" b="0">
-                <a:solidFill>
-                  <a:srgbClr val="7A7566"/>
-                </a:solidFill>
-                <a:latin typeface="Apple SD Gothic Neo"/>
-                <a:ea typeface="Apple SD Gothic Neo"/>
-                <a:cs typeface="Apple SD Gothic Neo"/>
-              </a:rPr>
-              <a:t> /</a:t>
-            </a:r>
-            <a:r>
-              <a:rPr sz="1000" b="0">
-                <a:solidFill>
-                  <a:srgbClr val="7A7566"/>
-                </a:solidFill>
-                <a:latin typeface="Apple SD Gothic Neo"/>
-                <a:ea typeface="Apple SD Gothic Neo"/>
-                <a:cs typeface="Apple SD Gothic Neo"/>
-              </a:rPr>
-              <a:t> 10</a:t>
+              <a:t>07 / 11</a:t>
             </a:r>
           </a:p>
         </p:txBody>
@@ -10703,7 +11453,7 @@
         <p:spPr>
           <a:xfrm>
             <a:off x="0" y="0"/>
-            <a:ext cx="9753356" cy="45720"/>
+            <a:ext cx="8866687" cy="45720"/>
           </a:xfrm>
           <a:prstGeom prst="rect">
             <a:avLst/>
@@ -10772,29 +11522,7 @@
                 <a:ea typeface="Apple SD Gothic Neo"/>
                 <a:cs typeface="Apple SD Gothic Neo"/>
               </a:rPr>
-              <a:t>08</a:t>
-            </a:r>
-            <a:r>
-              <a:rPr sz="1000" b="0">
-                <a:solidFill>
-                  <a:srgbClr val="7A7566"/>
-                </a:solidFill>
-                <a:latin typeface="Apple SD Gothic Neo"/>
-                <a:ea typeface="Apple SD Gothic Neo"/>
-                <a:cs typeface="Apple SD Gothic Neo"/>
-              </a:rPr>
-              <a:t> /</a:t>
-            </a:r>
-            <a:r>
-              <a:rPr sz="1000" b="0">
-                <a:solidFill>
-                  <a:srgbClr val="7A7566"/>
-                </a:solidFill>
-                <a:latin typeface="Apple SD Gothic Neo"/>
-                <a:ea typeface="Apple SD Gothic Neo"/>
-                <a:cs typeface="Apple SD Gothic Neo"/>
-              </a:rPr>
-              <a:t> 10</a:t>
+              <a:t>08 / 11</a:t>
             </a:r>
           </a:p>
         </p:txBody>
@@ -11454,7 +12182,7 @@
         <p:spPr>
           <a:xfrm>
             <a:off x="0" y="0"/>
-            <a:ext cx="10972525" cy="45720"/>
+            <a:ext cx="11083359" cy="45720"/>
           </a:xfrm>
           <a:prstGeom prst="rect">
             <a:avLst/>
@@ -11523,29 +12251,7 @@
                 <a:ea typeface="Apple SD Gothic Neo"/>
                 <a:cs typeface="Apple SD Gothic Neo"/>
               </a:rPr>
-              <a:t>09</a:t>
-            </a:r>
-            <a:r>
-              <a:rPr sz="1000" b="0">
-                <a:solidFill>
-                  <a:srgbClr val="7A7566"/>
-                </a:solidFill>
-                <a:latin typeface="Apple SD Gothic Neo"/>
-                <a:ea typeface="Apple SD Gothic Neo"/>
-                <a:cs typeface="Apple SD Gothic Neo"/>
-              </a:rPr>
-              <a:t> /</a:t>
-            </a:r>
-            <a:r>
-              <a:rPr sz="1000" b="0">
-                <a:solidFill>
-                  <a:srgbClr val="7A7566"/>
-                </a:solidFill>
-                <a:latin typeface="Apple SD Gothic Neo"/>
-                <a:ea typeface="Apple SD Gothic Neo"/>
-                <a:cs typeface="Apple SD Gothic Neo"/>
-              </a:rPr>
-              <a:t> 10</a:t>
+              <a:t>10 / 11</a:t>
             </a:r>
           </a:p>
         </p:txBody>
